--- a/curso/pptx/S62.pptx
+++ b/curso/pptx/S62.pptx
@@ -472,426 +472,6 @@
     </a:lvl9pPr>
   </p:notesStyle>
 </p:notesMaster>
-</file>
-
-<file path=ppt/notesSlides/notesSlide1.xml><?xml version="1.0" encoding="utf-8"?>
-<p:notes xmlns:a="http://schemas.openxmlformats.org/drawingml/2006/main" xmlns:p="http://schemas.openxmlformats.org/presentationml/2006/main" xmlns:r="http://schemas.openxmlformats.org/officeDocument/2006/relationships">
-  <p:cSld>
-    <p:spTree>
-      <p:nvGrpSpPr>
-        <p:cNvPr id="1" name=""/>
-        <p:cNvGrpSpPr/>
-        <p:nvPr/>
-      </p:nvGrpSpPr>
-      <p:grpSpPr>
-        <a:xfrm>
-          <a:off x="0" y="0"/>
-          <a:ext cx="0" cy="0"/>
-          <a:chOff x="0" y="0"/>
-          <a:chExt cx="0" cy="0"/>
-        </a:xfrm>
-      </p:grpSpPr>
-      <p:sp>
-        <p:nvSpPr>
-          <p:cNvPr id="2" name="Slide Image Placeholder 1"/>
-          <p:cNvSpPr>
-            <a:spLocks noGrp="1"/>
-          </p:cNvSpPr>
-          <p:nvPr>
-            <p:ph type="sldImg" idx="2"/>
-          </p:nvPr>
-        </p:nvSpPr>
-        <p:spPr/>
-      </p:sp>
-      <p:sp>
-        <p:nvSpPr>
-          <p:cNvPr id="3" name="Notes Placeholder 2"/>
-          <p:cNvSpPr>
-            <a:spLocks noGrp="1"/>
-          </p:cNvSpPr>
-          <p:nvPr>
-            <p:ph type="body" idx="3" sz="quarter"/>
-          </p:nvPr>
-        </p:nvSpPr>
-        <p:spPr/>
-        <p:txBody>
-          <a:bodyPr/>
-          <a:lstStyle/>
-          <a:p>
-            <a:r>
-              <a:t>3 minutos. Sin apuntes. Es para recordar, no cuenta para nota.</a:t>
-            </a:r>
-          </a:p>
-        </p:txBody>
-      </p:sp>
-      <p:sp>
-        <p:nvSpPr>
-          <p:cNvPr id="4" name="Slide Number Placeholder 3"/>
-          <p:cNvSpPr>
-            <a:spLocks noGrp="1"/>
-          </p:cNvSpPr>
-          <p:nvPr>
-            <p:ph type="sldNum" idx="5" sz="quarter"/>
-          </p:nvPr>
-        </p:nvSpPr>
-        <p:spPr/>
-      </p:sp>
-    </p:spTree>
-  </p:cSld>
-  <p:clrMapOvr>
-    <a:masterClrMapping/>
-  </p:clrMapOvr>
-</p:notes>
-</file>
-
-<file path=ppt/notesSlides/notesSlide2.xml><?xml version="1.0" encoding="utf-8"?>
-<p:notes xmlns:a="http://schemas.openxmlformats.org/drawingml/2006/main" xmlns:p="http://schemas.openxmlformats.org/presentationml/2006/main" xmlns:r="http://schemas.openxmlformats.org/officeDocument/2006/relationships">
-  <p:cSld>
-    <p:spTree>
-      <p:nvGrpSpPr>
-        <p:cNvPr id="1" name=""/>
-        <p:cNvGrpSpPr/>
-        <p:nvPr/>
-      </p:nvGrpSpPr>
-      <p:grpSpPr>
-        <a:xfrm>
-          <a:off x="0" y="0"/>
-          <a:ext cx="0" cy="0"/>
-          <a:chOff x="0" y="0"/>
-          <a:chExt cx="0" cy="0"/>
-        </a:xfrm>
-      </p:grpSpPr>
-      <p:sp>
-        <p:nvSpPr>
-          <p:cNvPr id="2" name="Slide Image Placeholder 1"/>
-          <p:cNvSpPr>
-            <a:spLocks noGrp="1"/>
-          </p:cNvSpPr>
-          <p:nvPr>
-            <p:ph type="sldImg" idx="2"/>
-          </p:nvPr>
-        </p:nvSpPr>
-        <p:spPr/>
-      </p:sp>
-      <p:sp>
-        <p:nvSpPr>
-          <p:cNvPr id="3" name="Notes Placeholder 2"/>
-          <p:cNvSpPr>
-            <a:spLocks noGrp="1"/>
-          </p:cNvSpPr>
-          <p:nvPr>
-            <p:ph type="body" idx="3" sz="quarter"/>
-          </p:nvPr>
-        </p:nvSpPr>
-        <p:spPr/>
-        <p:txBody>
-          <a:bodyPr/>
-          <a:lstStyle/>
-          <a:p>
-            <a:r>
-              <a:t>3 minutos. Sin apuntes. Es para recordar, no cuenta para nota.</a:t>
-            </a:r>
-          </a:p>
-        </p:txBody>
-      </p:sp>
-      <p:sp>
-        <p:nvSpPr>
-          <p:cNvPr id="4" name="Slide Number Placeholder 3"/>
-          <p:cNvSpPr>
-            <a:spLocks noGrp="1"/>
-          </p:cNvSpPr>
-          <p:nvPr>
-            <p:ph type="sldNum" idx="5" sz="quarter"/>
-          </p:nvPr>
-        </p:nvSpPr>
-        <p:spPr/>
-      </p:sp>
-    </p:spTree>
-  </p:cSld>
-  <p:clrMapOvr>
-    <a:masterClrMapping/>
-  </p:clrMapOvr>
-</p:notes>
-</file>
-
-<file path=ppt/notesSlides/notesSlide3.xml><?xml version="1.0" encoding="utf-8"?>
-<p:notes xmlns:a="http://schemas.openxmlformats.org/drawingml/2006/main" xmlns:p="http://schemas.openxmlformats.org/presentationml/2006/main" xmlns:r="http://schemas.openxmlformats.org/officeDocument/2006/relationships">
-  <p:cSld>
-    <p:spTree>
-      <p:nvGrpSpPr>
-        <p:cNvPr id="1" name=""/>
-        <p:cNvGrpSpPr/>
-        <p:nvPr/>
-      </p:nvGrpSpPr>
-      <p:grpSpPr>
-        <a:xfrm>
-          <a:off x="0" y="0"/>
-          <a:ext cx="0" cy="0"/>
-          <a:chOff x="0" y="0"/>
-          <a:chExt cx="0" cy="0"/>
-        </a:xfrm>
-      </p:grpSpPr>
-      <p:sp>
-        <p:nvSpPr>
-          <p:cNvPr id="2" name="Slide Image Placeholder 1"/>
-          <p:cNvSpPr>
-            <a:spLocks noGrp="1"/>
-          </p:cNvSpPr>
-          <p:nvPr>
-            <p:ph type="sldImg" idx="2"/>
-          </p:nvPr>
-        </p:nvSpPr>
-        <p:spPr/>
-      </p:sp>
-      <p:sp>
-        <p:nvSpPr>
-          <p:cNvPr id="3" name="Notes Placeholder 2"/>
-          <p:cNvSpPr>
-            <a:spLocks noGrp="1"/>
-          </p:cNvSpPr>
-          <p:nvPr>
-            <p:ph type="body" idx="3" sz="quarter"/>
-          </p:nvPr>
-        </p:nvSpPr>
-        <p:spPr/>
-        <p:txBody>
-          <a:bodyPr/>
-          <a:lstStyle/>
-          <a:p>
-            <a:r>
-              <a:t>Nadie tiene que contestar: solo pensarlo.</a:t>
-            </a:r>
-          </a:p>
-        </p:txBody>
-      </p:sp>
-      <p:sp>
-        <p:nvSpPr>
-          <p:cNvPr id="4" name="Slide Number Placeholder 3"/>
-          <p:cNvSpPr>
-            <a:spLocks noGrp="1"/>
-          </p:cNvSpPr>
-          <p:nvPr>
-            <p:ph type="sldNum" idx="5" sz="quarter"/>
-          </p:nvPr>
-        </p:nvSpPr>
-        <p:spPr/>
-      </p:sp>
-    </p:spTree>
-  </p:cSld>
-  <p:clrMapOvr>
-    <a:masterClrMapping/>
-  </p:clrMapOvr>
-</p:notes>
-</file>
-
-<file path=ppt/notesSlides/notesSlide4.xml><?xml version="1.0" encoding="utf-8"?>
-<p:notes xmlns:a="http://schemas.openxmlformats.org/drawingml/2006/main" xmlns:p="http://schemas.openxmlformats.org/presentationml/2006/main" xmlns:r="http://schemas.openxmlformats.org/officeDocument/2006/relationships">
-  <p:cSld>
-    <p:spTree>
-      <p:nvGrpSpPr>
-        <p:cNvPr id="1" name=""/>
-        <p:cNvGrpSpPr/>
-        <p:nvPr/>
-      </p:nvGrpSpPr>
-      <p:grpSpPr>
-        <a:xfrm>
-          <a:off x="0" y="0"/>
-          <a:ext cx="0" cy="0"/>
-          <a:chOff x="0" y="0"/>
-          <a:chExt cx="0" cy="0"/>
-        </a:xfrm>
-      </p:grpSpPr>
-      <p:sp>
-        <p:nvSpPr>
-          <p:cNvPr id="2" name="Slide Image Placeholder 1"/>
-          <p:cNvSpPr>
-            <a:spLocks noGrp="1"/>
-          </p:cNvSpPr>
-          <p:nvPr>
-            <p:ph type="sldImg" idx="2"/>
-          </p:nvPr>
-        </p:nvSpPr>
-        <p:spPr/>
-      </p:sp>
-      <p:sp>
-        <p:nvSpPr>
-          <p:cNvPr id="3" name="Notes Placeholder 2"/>
-          <p:cNvSpPr>
-            <a:spLocks noGrp="1"/>
-          </p:cNvSpPr>
-          <p:nvPr>
-            <p:ph type="body" idx="3" sz="quarter"/>
-          </p:nvPr>
-        </p:nvSpPr>
-        <p:spPr/>
-        <p:txBody>
-          <a:bodyPr/>
-          <a:lstStyle/>
-          <a:p>
-            <a:r>
-              <a:t>Dejar unos segundos para que piensen la respuesta fácil antes de enseñar los pasos.</a:t>
-            </a:r>
-          </a:p>
-        </p:txBody>
-      </p:sp>
-      <p:sp>
-        <p:nvSpPr>
-          <p:cNvPr id="4" name="Slide Number Placeholder 3"/>
-          <p:cNvSpPr>
-            <a:spLocks noGrp="1"/>
-          </p:cNvSpPr>
-          <p:nvPr>
-            <p:ph type="sldNum" idx="5" sz="quarter"/>
-          </p:nvPr>
-        </p:nvSpPr>
-        <p:spPr/>
-      </p:sp>
-    </p:spTree>
-  </p:cSld>
-  <p:clrMapOvr>
-    <a:masterClrMapping/>
-  </p:clrMapOvr>
-</p:notes>
-</file>
-
-<file path=ppt/notesSlides/notesSlide5.xml><?xml version="1.0" encoding="utf-8"?>
-<p:notes xmlns:a="http://schemas.openxmlformats.org/drawingml/2006/main" xmlns:p="http://schemas.openxmlformats.org/presentationml/2006/main" xmlns:r="http://schemas.openxmlformats.org/officeDocument/2006/relationships">
-  <p:cSld>
-    <p:spTree>
-      <p:nvGrpSpPr>
-        <p:cNvPr id="1" name=""/>
-        <p:cNvGrpSpPr/>
-        <p:nvPr/>
-      </p:nvGrpSpPr>
-      <p:grpSpPr>
-        <a:xfrm>
-          <a:off x="0" y="0"/>
-          <a:ext cx="0" cy="0"/>
-          <a:chOff x="0" y="0"/>
-          <a:chExt cx="0" cy="0"/>
-        </a:xfrm>
-      </p:grpSpPr>
-      <p:sp>
-        <p:nvSpPr>
-          <p:cNvPr id="2" name="Slide Image Placeholder 1"/>
-          <p:cNvSpPr>
-            <a:spLocks noGrp="1"/>
-          </p:cNvSpPr>
-          <p:nvPr>
-            <p:ph type="sldImg" idx="2"/>
-          </p:nvPr>
-        </p:nvSpPr>
-        <p:spPr/>
-      </p:sp>
-      <p:sp>
-        <p:nvSpPr>
-          <p:cNvPr id="3" name="Notes Placeholder 2"/>
-          <p:cNvSpPr>
-            <a:spLocks noGrp="1"/>
-          </p:cNvSpPr>
-          <p:nvPr>
-            <p:ph type="body" idx="3" sz="quarter"/>
-          </p:nvPr>
-        </p:nvSpPr>
-        <p:spPr/>
-        <p:txBody>
-          <a:bodyPr/>
-          <a:lstStyle/>
-          <a:p>
-            <a:r>
-              <a:t>Dejar 2 minutos para que lo escriban. La diapositiva siguiente muestra el resumen.</a:t>
-            </a:r>
-          </a:p>
-        </p:txBody>
-      </p:sp>
-      <p:sp>
-        <p:nvSpPr>
-          <p:cNvPr id="4" name="Slide Number Placeholder 3"/>
-          <p:cNvSpPr>
-            <a:spLocks noGrp="1"/>
-          </p:cNvSpPr>
-          <p:nvPr>
-            <p:ph type="sldNum" idx="5" sz="quarter"/>
-          </p:nvPr>
-        </p:nvSpPr>
-        <p:spPr/>
-      </p:sp>
-    </p:spTree>
-  </p:cSld>
-  <p:clrMapOvr>
-    <a:masterClrMapping/>
-  </p:clrMapOvr>
-</p:notes>
-</file>
-
-<file path=ppt/notesSlides/notesSlide6.xml><?xml version="1.0" encoding="utf-8"?>
-<p:notes xmlns:a="http://schemas.openxmlformats.org/drawingml/2006/main" xmlns:p="http://schemas.openxmlformats.org/presentationml/2006/main" xmlns:r="http://schemas.openxmlformats.org/officeDocument/2006/relationships">
-  <p:cSld>
-    <p:spTree>
-      <p:nvGrpSpPr>
-        <p:cNvPr id="1" name=""/>
-        <p:cNvGrpSpPr/>
-        <p:nvPr/>
-      </p:nvGrpSpPr>
-      <p:grpSpPr>
-        <a:xfrm>
-          <a:off x="0" y="0"/>
-          <a:ext cx="0" cy="0"/>
-          <a:chOff x="0" y="0"/>
-          <a:chExt cx="0" cy="0"/>
-        </a:xfrm>
-      </p:grpSpPr>
-      <p:sp>
-        <p:nvSpPr>
-          <p:cNvPr id="2" name="Slide Image Placeholder 1"/>
-          <p:cNvSpPr>
-            <a:spLocks noGrp="1"/>
-          </p:cNvSpPr>
-          <p:nvPr>
-            <p:ph type="sldImg" idx="2"/>
-          </p:nvPr>
-        </p:nvSpPr>
-        <p:spPr/>
-      </p:sp>
-      <p:sp>
-        <p:nvSpPr>
-          <p:cNvPr id="3" name="Notes Placeholder 2"/>
-          <p:cNvSpPr>
-            <a:spLocks noGrp="1"/>
-          </p:cNvSpPr>
-          <p:nvPr>
-            <p:ph type="body" idx="3" sz="quarter"/>
-          </p:nvPr>
-        </p:nvSpPr>
-        <p:spPr/>
-        <p:txBody>
-          <a:bodyPr/>
-          <a:lstStyle/>
-          <a:p>
-            <a:r>
-              <a:t>Buscar: «escucha activa qué es» · «escuchar para entender, no para responder»</a:t>
-            </a:r>
-          </a:p>
-        </p:txBody>
-      </p:sp>
-      <p:sp>
-        <p:nvSpPr>
-          <p:cNvPr id="4" name="Slide Number Placeholder 3"/>
-          <p:cNvSpPr>
-            <a:spLocks noGrp="1"/>
-          </p:cNvSpPr>
-          <p:nvPr>
-            <p:ph type="sldNum" idx="5" sz="quarter"/>
-          </p:nvPr>
-        </p:nvSpPr>
-        <p:spPr/>
-      </p:sp>
-    </p:spTree>
-  </p:cSld>
-  <p:clrMapOvr>
-    <a:masterClrMapping/>
-  </p:clrMapOvr>
-</p:notes>
 </file>
 
 <file path=ppt/slideLayouts/slideLayout1.xml><?xml version="1.0" encoding="utf-8"?>

--- a/curso/pptx/S62.pptx
+++ b/curso/pptx/S62.pptx
@@ -3800,7 +3800,7 @@
                 </a:solidFill>
                 <a:latin typeface="Nunito Sans"/>
               </a:rPr>
-              <a:t>Aitor escribe: «Paso de ir al cumple de Dylan». Maialen podría contestar: «¡Qué borde eres!». Pero escribe: «¿Quieres decir que no te apetece o que no puedes?».</a:t>
+              <a:t>Un chico escribe: «Paso de ir al cumple de un compañero». Una chica podría contestar: «¡Qué borde eres!». Pero escribe: «¿Quieres decir que no te apetece o que no puedes?».</a:t>
             </a:r>
           </a:p>
         </p:txBody>
@@ -3848,7 +3848,7 @@
                 </a:solidFill>
                 <a:latin typeface="Nunito Sans"/>
               </a:rPr>
-              <a:t>Maialen no contesta a lo que ella imagina: primero comprueba.</a:t>
+              <a:t>La chica no contesta a lo que ella imagina: primero comprueba.</a:t>
             </a:r>
           </a:p>
           <a:p>
@@ -3873,7 +3873,7 @@
                 </a:solidFill>
                 <a:latin typeface="Nunito Sans"/>
               </a:rPr>
-              <a:t>Reformula: pone dos formas de entender lo que dice Aitor.</a:t>
+              <a:t>Reformula: pone dos formas de entender lo que dice el chico.</a:t>
             </a:r>
           </a:p>
           <a:p>
@@ -3898,7 +3898,7 @@
                 </a:solidFill>
                 <a:latin typeface="Nunito Sans"/>
               </a:rPr>
-              <a:t>Aitor responde: «No puedo, tengo partido». No era borde.</a:t>
+              <a:t>El chico responde: «No puedo, tengo partido». No era borde.</a:t>
             </a:r>
           </a:p>
           <a:p>
@@ -4109,7 +4109,7 @@
                 </a:solidFill>
                 <a:latin typeface="Nunito Sans"/>
               </a:rPr>
-              <a:t>Chen le dice a su padre: «Necesito un móvil nuevo». Su padre, en lugar de decir que no, pregunta: «¿Por qué? ¿Qué le pasa al tuyo?».</a:t>
+              <a:t>Un chico le dice a su padre: «Necesito un móvil nuevo». Su padre, en lugar de decir que no, pregunta: «¿Por qué? ¿Qué le pasa al tuyo?».</a:t>
             </a:r>
           </a:p>
         </p:txBody>
@@ -4182,7 +4182,7 @@
                 </a:solidFill>
                 <a:latin typeface="Nunito Sans"/>
               </a:rPr>
-              <a:t>Chen tiene que pensar: «La batería no me dura ni media mañana».</a:t>
+              <a:t>El chico tiene que pensar: «La batería no me dura ni media mañana».</a:t>
             </a:r>
           </a:p>
           <a:p>
@@ -4418,7 +4418,7 @@
                 </a:solidFill>
                 <a:latin typeface="Nunito Sans"/>
               </a:rPr>
-              <a:t>Omar dice que le gusta una serie. Dylan le suelta: «¿Por qué? ¿Cómo lo sabes? ¿Seguro? ¿Y eso por qué?», sin esperar las respuestas, para dejarle en ridículo.</a:t>
+              <a:t>Un chico dice que le gusta una serie. Otro chico le suelta: «¿Por qué? ¿Cómo lo sabes? ¿Seguro? ¿Y eso por qué?», sin esperar las respuestas, para dejarle en ridículo.</a:t>
             </a:r>
           </a:p>
         </p:txBody>
@@ -4466,7 +4466,7 @@
                 </a:solidFill>
                 <a:latin typeface="Nunito Sans"/>
               </a:rPr>
-              <a:t>Dylan pide razones todo el rato. ¿Está dialogando bien?</a:t>
+              <a:t>Ese chico pide razones todo el rato. ¿Está dialogando bien?</a:t>
             </a:r>
           </a:p>
           <a:p>
@@ -4541,7 +4541,7 @@
                 </a:solidFill>
                 <a:latin typeface="Nunito Sans"/>
               </a:rPr>
-              <a:t>Además, «me gusta» es un gusto: habla de Omar y no hay que demostrarlo (sesión 2).</a:t>
+              <a:t>Además, «me gusta» es un gusto: habla del primero y no hay que demostrarlo (sesión 2).</a:t>
             </a:r>
           </a:p>
           <a:p>
@@ -6694,7 +6694,7 @@
                 </a:solidFill>
                 <a:latin typeface="Nunito Sans"/>
               </a:rPr>
-              <a:t>Naiara manda un audio de dos minutos. Kevin lo escucha a doble velocidad, mientras juega, y contesta: «Ya, pero…».</a:t>
+              <a:t>Una chica manda un audio de dos minutos. Un chico lo escucha a doble velocidad, mientras juega, y contesta: «Ya, pero…».</a:t>
             </a:r>
           </a:p>
         </p:txBody>
@@ -6733,7 +6733,7 @@
                 </a:solidFill>
                 <a:latin typeface="Nunito Sans"/>
               </a:rPr>
-              <a:t>¿Ha escuchado Kevin a Naiara?</a:t>
+              <a:t>¿Ha escuchado ese chico a la chica?</a:t>
             </a:r>
           </a:p>
         </p:txBody>

--- a/curso/pptx/S62.pptx
+++ b/curso/pptx/S62.pptx
@@ -4516,7 +4516,7 @@
                 </a:solidFill>
                 <a:latin typeface="Nunito Sans"/>
               </a:rPr>
-              <a:t>Pero no espera las respuestas: no escucha. Y pregunta para pillar, no para entender (sesión 4).</a:t>
+              <a:t>Pero no espera las respuestas: no escucha. Y pregunta para pillar, no para entender (sesión 12).</a:t>
             </a:r>
           </a:p>
           <a:p>
@@ -4929,7 +4929,7 @@
                 </a:solidFill>
                 <a:latin typeface="Nunito Sans"/>
               </a:rPr>
-              <a:t>Cambiar lo que dijo (hombre de paja, sesión 15)</a:t>
+              <a:t>Cambiar lo que dijo (hombre de paja, sesión 21)</a:t>
             </a:r>
           </a:p>
           <a:p>
